--- a/artifacts/active/survey_ppt_figures/Figure_supporting_workflows_native_grouped.pptx
+++ b/artifacts/active/survey_ppt_figures/Figure_supporting_workflows_native_grouped.pptx
@@ -4365,7 +4365,7 @@
       </p:grpSpPr>
       <p:grpSp>
         <p:nvGrpSpPr>
-          <p:cNvPr id="39" name="group-remaining-components"/>
+          <p:cNvPr id="35" name="group-remaining-components"/>
           <p:cNvGrpSpPr/>
           <p:nvPr/>
         </p:nvGrpSpPr>
@@ -4379,127 +4379,15 @@
         </p:grpSpPr>
         <p:sp>
           <p:nvSpPr>
-            <p:cNvPr id="21" name="">
-              <a:extLst xmlns:a="http://schemas.openxmlformats.org/drawingml/2006/main">
-                <a:ext uri="{FF2B5EF4-FFF2-40B4-BE49-F238E27FC236}">
-                  <a16:creationId xmlns:a16="http://schemas.microsoft.com/office/drawing/2014/main" id="{F0004500-C3B8-497D-A1D1-B32E4BB47361}"/>
-                </a:ext>
-              </a:extLst>
-            </p:cNvPr>
-            <p:cNvSpPr>
-              <a:spLocks xmlns:a="http://schemas.openxmlformats.org/drawingml/2006/main" noGrp="1"/>
-            </p:cNvSpPr>
-            <p:nvPr/>
-          </p:nvSpPr>
-          <p:spPr>
-            <a:xfrm xmlns:a="http://schemas.openxmlformats.org/drawingml/2006/main">
-              <a:off x="476250" y="228600"/>
-              <a:ext cx="11239500" cy="381000"/>
-            </a:xfrm>
-            <a:prstGeom xmlns:a="http://schemas.openxmlformats.org/drawingml/2006/main" prst="rect">
-              <a:avLst/>
-            </a:prstGeom>
-            <a:noFill xmlns:a="http://schemas.openxmlformats.org/drawingml/2006/main"/>
-            <a:ln xmlns:a="http://schemas.openxmlformats.org/drawingml/2006/main" w="0">
-              <a:noFill/>
-              <a:prstDash val="solid"/>
-            </a:ln>
-          </p:spPr>
-          <p:txBody>
-            <a:bodyPr xmlns:a="http://schemas.openxmlformats.org/drawingml/2006/main"/>
-            <a:lstStyle xmlns:a="http://schemas.openxmlformats.org/drawingml/2006/main"/>
-            <a:p xmlns:a="http://schemas.openxmlformats.org/drawingml/2006/main">
-              <a:pPr>
-                <a:defRPr sz="2400" b="1" i="0">
-                  <a:solidFill>
-                    <a:srgbClr val="24324A"/>
-                  </a:solidFill>
-                  <a:latin typeface="Times New Roman"/>
-                  <a:ea typeface="Times New Roman"/>
-                  <a:cs typeface="Times New Roman"/>
-                </a:defRPr>
-              </a:pPr>
-              <a:r>
-                <a:rPr sz="2400" b="1" i="0">
-                  <a:solidFill>
-                    <a:srgbClr val="24324A"/>
-                  </a:solidFill>
-                  <a:latin typeface="Times New Roman"/>
-                  <a:ea typeface="Times New Roman"/>
-                  <a:cs typeface="Times New Roman"/>
-                </a:rPr>
-                <a:t>Retrieval, augmentation, and review</a:t>
-              </a:r>
-            </a:p>
-          </p:txBody>
-        </p:sp>
-        <p:sp>
-          <p:nvSpPr>
-            <p:cNvPr id="2" name="">
-              <a:extLst xmlns:a="http://schemas.openxmlformats.org/drawingml/2006/main">
-                <a:ext uri="{FF2B5EF4-FFF2-40B4-BE49-F238E27FC236}">
-                  <a16:creationId xmlns:a16="http://schemas.microsoft.com/office/drawing/2014/main" id="{8BF1E4AF-BD1D-43D2-97E1-CC1DB552FC5B}"/>
-                </a:ext>
-              </a:extLst>
-            </p:cNvPr>
-            <p:cNvSpPr>
-              <a:spLocks xmlns:a="http://schemas.openxmlformats.org/drawingml/2006/main" noGrp="1"/>
-            </p:cNvSpPr>
-            <p:nvPr/>
-          </p:nvSpPr>
-          <p:spPr>
-            <a:xfrm xmlns:a="http://schemas.openxmlformats.org/drawingml/2006/main">
-              <a:off x="476250" y="647700"/>
-              <a:ext cx="11239500" cy="238125"/>
-            </a:xfrm>
-            <a:prstGeom xmlns:a="http://schemas.openxmlformats.org/drawingml/2006/main" prst="rect">
-              <a:avLst/>
-            </a:prstGeom>
-            <a:noFill xmlns:a="http://schemas.openxmlformats.org/drawingml/2006/main"/>
-            <a:ln xmlns:a="http://schemas.openxmlformats.org/drawingml/2006/main" w="0">
-              <a:noFill/>
-              <a:prstDash val="solid"/>
-            </a:ln>
-          </p:spPr>
-          <p:txBody>
-            <a:bodyPr xmlns:a="http://schemas.openxmlformats.org/drawingml/2006/main"/>
-            <a:lstStyle xmlns:a="http://schemas.openxmlformats.org/drawingml/2006/main"/>
-            <a:p xmlns:a="http://schemas.openxmlformats.org/drawingml/2006/main">
-              <a:pPr>
-                <a:defRPr sz="1125" b="0" i="1">
-                  <a:solidFill>
-                    <a:srgbClr val="687386"/>
-                  </a:solidFill>
-                  <a:latin typeface="Times New Roman"/>
-                  <a:ea typeface="Times New Roman"/>
-                  <a:cs typeface="Times New Roman"/>
-                </a:defRPr>
-              </a:pPr>
-              <a:r>
-                <a:rPr sz="1125" b="0" i="1">
-                  <a:solidFill>
-                    <a:srgbClr val="687386"/>
-                  </a:solidFill>
-                  <a:latin typeface="Times New Roman"/>
-                  <a:ea typeface="Times New Roman"/>
-                  <a:cs typeface="Times New Roman"/>
-                </a:rPr>
-                <a:t>A task-specific synthesis loop couples candidate generation to fidelity and utility checks.</a:t>
-              </a:r>
-            </a:p>
-          </p:txBody>
-        </p:sp>
-        <p:sp>
-          <p:nvSpPr>
-            <p:cNvPr id="3" name="">
-              <a:extLst xmlns:a="http://schemas.openxmlformats.org/drawingml/2006/main">
-                <a:ext uri="{FF2B5EF4-FFF2-40B4-BE49-F238E27FC236}">
-                  <a16:creationId xmlns:a16="http://schemas.microsoft.com/office/drawing/2014/main" id="{2FAD87D0-35AE-47D8-88F7-5438491743E6}"/>
-                </a:ext>
-              </a:extLst>
-            </p:cNvPr>
-            <p:cNvSpPr>
-              <a:spLocks xmlns:a="http://schemas.openxmlformats.org/drawingml/2006/main" noGrp="1"/>
+            <p:cNvPr id="19" name="">
+              <a:extLst xmlns:a="http://schemas.openxmlformats.org/drawingml/2006/main">
+                <a:ext uri="{FF2B5EF4-FFF2-40B4-BE49-F238E27FC236}">
+                  <a16:creationId xmlns:a16="http://schemas.microsoft.com/office/drawing/2014/main" id="{B19D1328-A266-45F2-93ED-7FEE1A354B19}"/>
+                </a:ext>
+              </a:extLst>
+            </p:cNvPr>
+            <p:cNvSpPr>
+              <a:spLocks xmlns:a="http://schemas.openxmlformats.org/drawingml/2006/main"/>
             </p:cNvSpPr>
             <p:nvPr/>
           </p:nvSpPr>
@@ -4526,15 +4414,15 @@
         </p:sp>
         <p:sp>
           <p:nvSpPr>
-            <p:cNvPr id="4" name="">
-              <a:extLst xmlns:a="http://schemas.openxmlformats.org/drawingml/2006/main">
-                <a:ext uri="{FF2B5EF4-FFF2-40B4-BE49-F238E27FC236}">
-                  <a16:creationId xmlns:a16="http://schemas.microsoft.com/office/drawing/2014/main" id="{DE31AE0A-8C7F-41A5-B918-5A389C45E9FE}"/>
-                </a:ext>
-              </a:extLst>
-            </p:cNvPr>
-            <p:cNvSpPr>
-              <a:spLocks xmlns:a="http://schemas.openxmlformats.org/drawingml/2006/main" noGrp="1"/>
+            <p:cNvPr id="2" name="">
+              <a:extLst xmlns:a="http://schemas.openxmlformats.org/drawingml/2006/main">
+                <a:ext uri="{FF2B5EF4-FFF2-40B4-BE49-F238E27FC236}">
+                  <a16:creationId xmlns:a16="http://schemas.microsoft.com/office/drawing/2014/main" id="{ED41BC84-DEF8-4828-A22F-4A7D5674FC24}"/>
+                </a:ext>
+              </a:extLst>
+            </p:cNvPr>
+            <p:cNvSpPr>
+              <a:spLocks xmlns:a="http://schemas.openxmlformats.org/drawingml/2006/main"/>
             </p:cNvSpPr>
             <p:nvPr/>
           </p:nvSpPr>
@@ -4582,15 +4470,15 @@
         </p:sp>
         <p:sp>
           <p:nvSpPr>
-            <p:cNvPr id="5" name="">
-              <a:extLst xmlns:a="http://schemas.openxmlformats.org/drawingml/2006/main">
-                <a:ext uri="{FF2B5EF4-FFF2-40B4-BE49-F238E27FC236}">
-                  <a16:creationId xmlns:a16="http://schemas.microsoft.com/office/drawing/2014/main" id="{1D2664DE-66FD-430F-AEF1-EBA80EC5A2E7}"/>
-                </a:ext>
-              </a:extLst>
-            </p:cNvPr>
-            <p:cNvSpPr>
-              <a:spLocks xmlns:a="http://schemas.openxmlformats.org/drawingml/2006/main" noGrp="1"/>
+            <p:cNvPr id="3" name="">
+              <a:extLst xmlns:a="http://schemas.openxmlformats.org/drawingml/2006/main">
+                <a:ext uri="{FF2B5EF4-FFF2-40B4-BE49-F238E27FC236}">
+                  <a16:creationId xmlns:a16="http://schemas.microsoft.com/office/drawing/2014/main" id="{DDC16A42-BE3B-43E0-B610-F48AC84091A1}"/>
+                </a:ext>
+              </a:extLst>
+            </p:cNvPr>
+            <p:cNvSpPr>
+              <a:spLocks xmlns:a="http://schemas.openxmlformats.org/drawingml/2006/main"/>
             </p:cNvSpPr>
             <p:nvPr/>
           </p:nvSpPr>
@@ -4638,15 +4526,15 @@
         </p:sp>
         <p:sp>
           <p:nvSpPr>
-            <p:cNvPr id="6" name="">
-              <a:extLst xmlns:a="http://schemas.openxmlformats.org/drawingml/2006/main">
-                <a:ext uri="{FF2B5EF4-FFF2-40B4-BE49-F238E27FC236}">
-                  <a16:creationId xmlns:a16="http://schemas.microsoft.com/office/drawing/2014/main" id="{A3AB5FCE-7199-402F-A845-0CB117B511E5}"/>
-                </a:ext>
-              </a:extLst>
-            </p:cNvPr>
-            <p:cNvSpPr>
-              <a:spLocks xmlns:a="http://schemas.openxmlformats.org/drawingml/2006/main" noGrp="1"/>
+            <p:cNvPr id="4" name="">
+              <a:extLst xmlns:a="http://schemas.openxmlformats.org/drawingml/2006/main">
+                <a:ext uri="{FF2B5EF4-FFF2-40B4-BE49-F238E27FC236}">
+                  <a16:creationId xmlns:a16="http://schemas.microsoft.com/office/drawing/2014/main" id="{D2768537-3B1E-49A7-BC1D-FA34482B201E}"/>
+                </a:ext>
+              </a:extLst>
+            </p:cNvPr>
+            <p:cNvSpPr>
+              <a:spLocks xmlns:a="http://schemas.openxmlformats.org/drawingml/2006/main"/>
             </p:cNvSpPr>
             <p:nvPr/>
           </p:nvSpPr>
@@ -4673,15 +4561,15 @@
         </p:sp>
         <p:sp>
           <p:nvSpPr>
-            <p:cNvPr id="7" name="">
-              <a:extLst xmlns:a="http://schemas.openxmlformats.org/drawingml/2006/main">
-                <a:ext uri="{FF2B5EF4-FFF2-40B4-BE49-F238E27FC236}">
-                  <a16:creationId xmlns:a16="http://schemas.microsoft.com/office/drawing/2014/main" id="{22F97C9B-E5CB-4A63-997D-088E6D2B8052}"/>
-                </a:ext>
-              </a:extLst>
-            </p:cNvPr>
-            <p:cNvSpPr>
-              <a:spLocks xmlns:a="http://schemas.openxmlformats.org/drawingml/2006/main" noGrp="1"/>
+            <p:cNvPr id="5" name="">
+              <a:extLst xmlns:a="http://schemas.openxmlformats.org/drawingml/2006/main">
+                <a:ext uri="{FF2B5EF4-FFF2-40B4-BE49-F238E27FC236}">
+                  <a16:creationId xmlns:a16="http://schemas.microsoft.com/office/drawing/2014/main" id="{FEE4111A-FEFD-434F-BD85-C0AE413445B7}"/>
+                </a:ext>
+              </a:extLst>
+            </p:cNvPr>
+            <p:cNvSpPr>
+              <a:spLocks xmlns:a="http://schemas.openxmlformats.org/drawingml/2006/main"/>
             </p:cNvSpPr>
             <p:nvPr/>
           </p:nvSpPr>
@@ -4729,15 +4617,15 @@
         </p:sp>
         <p:sp>
           <p:nvSpPr>
-            <p:cNvPr id="8" name="">
-              <a:extLst xmlns:a="http://schemas.openxmlformats.org/drawingml/2006/main">
-                <a:ext uri="{FF2B5EF4-FFF2-40B4-BE49-F238E27FC236}">
-                  <a16:creationId xmlns:a16="http://schemas.microsoft.com/office/drawing/2014/main" id="{17F6B243-C763-48E3-B6FD-E59DA9EE639B}"/>
-                </a:ext>
-              </a:extLst>
-            </p:cNvPr>
-            <p:cNvSpPr>
-              <a:spLocks xmlns:a="http://schemas.openxmlformats.org/drawingml/2006/main" noGrp="1"/>
+            <p:cNvPr id="6" name="">
+              <a:extLst xmlns:a="http://schemas.openxmlformats.org/drawingml/2006/main">
+                <a:ext uri="{FF2B5EF4-FFF2-40B4-BE49-F238E27FC236}">
+                  <a16:creationId xmlns:a16="http://schemas.microsoft.com/office/drawing/2014/main" id="{5A7BD6D4-F657-4221-905C-AD5D73B6641B}"/>
+                </a:ext>
+              </a:extLst>
+            </p:cNvPr>
+            <p:cNvSpPr>
+              <a:spLocks xmlns:a="http://schemas.openxmlformats.org/drawingml/2006/main"/>
             </p:cNvSpPr>
             <p:nvPr/>
           </p:nvSpPr>
@@ -4778,22 +4666,22 @@
                   <a:ea typeface="Times New Roman"/>
                   <a:cs typeface="Times New Roman"/>
                 </a:rPr>
-                <a:t>generates a conditioned sample</a:t>
+                <a:t>selects suitable augmentation strategies</a:t>
               </a:r>
             </a:p>
           </p:txBody>
         </p:sp>
         <p:sp>
           <p:nvSpPr>
-            <p:cNvPr id="9" name="">
-              <a:extLst xmlns:a="http://schemas.openxmlformats.org/drawingml/2006/main">
-                <a:ext uri="{FF2B5EF4-FFF2-40B4-BE49-F238E27FC236}">
-                  <a16:creationId xmlns:a16="http://schemas.microsoft.com/office/drawing/2014/main" id="{F98CB867-9EEB-4868-A32F-680402268DD1}"/>
-                </a:ext>
-              </a:extLst>
-            </p:cNvPr>
-            <p:cNvSpPr>
-              <a:spLocks xmlns:a="http://schemas.openxmlformats.org/drawingml/2006/main" noGrp="1"/>
+            <p:cNvPr id="7" name="">
+              <a:extLst xmlns:a="http://schemas.openxmlformats.org/drawingml/2006/main">
+                <a:ext uri="{FF2B5EF4-FFF2-40B4-BE49-F238E27FC236}">
+                  <a16:creationId xmlns:a16="http://schemas.microsoft.com/office/drawing/2014/main" id="{BC35CF88-5244-4303-A02D-C0537BFBBE14}"/>
+                </a:ext>
+              </a:extLst>
+            </p:cNvPr>
+            <p:cNvSpPr>
+              <a:spLocks xmlns:a="http://schemas.openxmlformats.org/drawingml/2006/main"/>
             </p:cNvSpPr>
             <p:nvPr/>
           </p:nvSpPr>
@@ -4820,15 +4708,15 @@
         </p:sp>
         <p:sp>
           <p:nvSpPr>
-            <p:cNvPr id="10" name="">
-              <a:extLst xmlns:a="http://schemas.openxmlformats.org/drawingml/2006/main">
-                <a:ext uri="{FF2B5EF4-FFF2-40B4-BE49-F238E27FC236}">
-                  <a16:creationId xmlns:a16="http://schemas.microsoft.com/office/drawing/2014/main" id="{66431B8D-C0C3-47DA-86F0-6619366BC832}"/>
-                </a:ext>
-              </a:extLst>
-            </p:cNvPr>
-            <p:cNvSpPr>
-              <a:spLocks xmlns:a="http://schemas.openxmlformats.org/drawingml/2006/main" noGrp="1"/>
+            <p:cNvPr id="8" name="">
+              <a:extLst xmlns:a="http://schemas.openxmlformats.org/drawingml/2006/main">
+                <a:ext uri="{FF2B5EF4-FFF2-40B4-BE49-F238E27FC236}">
+                  <a16:creationId xmlns:a16="http://schemas.microsoft.com/office/drawing/2014/main" id="{E8FCF032-60EB-4BD6-99B7-DFACD49B5602}"/>
+                </a:ext>
+              </a:extLst>
+            </p:cNvPr>
+            <p:cNvSpPr>
+              <a:spLocks xmlns:a="http://schemas.openxmlformats.org/drawingml/2006/main"/>
             </p:cNvSpPr>
             <p:nvPr/>
           </p:nvSpPr>
@@ -4876,15 +4764,15 @@
         </p:sp>
         <p:sp>
           <p:nvSpPr>
-            <p:cNvPr id="11" name="">
-              <a:extLst xmlns:a="http://schemas.openxmlformats.org/drawingml/2006/main">
-                <a:ext uri="{FF2B5EF4-FFF2-40B4-BE49-F238E27FC236}">
-                  <a16:creationId xmlns:a16="http://schemas.microsoft.com/office/drawing/2014/main" id="{45D8BB23-BE62-4CC2-9974-FD6975D8CB7A}"/>
-                </a:ext>
-              </a:extLst>
-            </p:cNvPr>
-            <p:cNvSpPr>
-              <a:spLocks xmlns:a="http://schemas.openxmlformats.org/drawingml/2006/main" noGrp="1"/>
+            <p:cNvPr id="9" name="">
+              <a:extLst xmlns:a="http://schemas.openxmlformats.org/drawingml/2006/main">
+                <a:ext uri="{FF2B5EF4-FFF2-40B4-BE49-F238E27FC236}">
+                  <a16:creationId xmlns:a16="http://schemas.microsoft.com/office/drawing/2014/main" id="{F1894E27-57D3-47D8-A1DE-827A8DF1E901}"/>
+                </a:ext>
+              </a:extLst>
+            </p:cNvPr>
+            <p:cNvSpPr>
+              <a:spLocks xmlns:a="http://schemas.openxmlformats.org/drawingml/2006/main"/>
             </p:cNvSpPr>
             <p:nvPr/>
           </p:nvSpPr>
@@ -4925,22 +4813,22 @@
                   <a:ea typeface="Times New Roman"/>
                   <a:cs typeface="Times New Roman"/>
                 </a:rPr>
-                <a:t>checks fidelity and utility</a:t>
+                <a:t>semantic quality of positive views</a:t>
               </a:r>
             </a:p>
           </p:txBody>
         </p:sp>
         <p:sp>
           <p:nvSpPr>
-            <p:cNvPr id="12" name="">
-              <a:extLst xmlns:a="http://schemas.openxmlformats.org/drawingml/2006/main">
-                <a:ext uri="{FF2B5EF4-FFF2-40B4-BE49-F238E27FC236}">
-                  <a16:creationId xmlns:a16="http://schemas.microsoft.com/office/drawing/2014/main" id="{32E9F4D4-F9EC-4BDA-982D-AE7477A5ACBF}"/>
-                </a:ext>
-              </a:extLst>
-            </p:cNvPr>
-            <p:cNvSpPr>
-              <a:spLocks xmlns:a="http://schemas.openxmlformats.org/drawingml/2006/main" noGrp="1"/>
+            <p:cNvPr id="10" name="">
+              <a:extLst xmlns:a="http://schemas.openxmlformats.org/drawingml/2006/main">
+                <a:ext uri="{FF2B5EF4-FFF2-40B4-BE49-F238E27FC236}">
+                  <a16:creationId xmlns:a16="http://schemas.microsoft.com/office/drawing/2014/main" id="{B969227C-5486-4FB7-A652-50DF8F8FD605}"/>
+                </a:ext>
+              </a:extLst>
+            </p:cNvPr>
+            <p:cNvSpPr>
+              <a:spLocks xmlns:a="http://schemas.openxmlformats.org/drawingml/2006/main"/>
             </p:cNvSpPr>
             <p:nvPr/>
           </p:nvSpPr>
@@ -4967,15 +4855,15 @@
         </p:sp>
         <p:sp>
           <p:nvSpPr>
-            <p:cNvPr id="13" name="">
-              <a:extLst xmlns:a="http://schemas.openxmlformats.org/drawingml/2006/main">
-                <a:ext uri="{FF2B5EF4-FFF2-40B4-BE49-F238E27FC236}">
-                  <a16:creationId xmlns:a16="http://schemas.microsoft.com/office/drawing/2014/main" id="{CDEA864E-5470-43CA-BF29-A516B775849B}"/>
-                </a:ext>
-              </a:extLst>
-            </p:cNvPr>
-            <p:cNvSpPr>
-              <a:spLocks xmlns:a="http://schemas.openxmlformats.org/drawingml/2006/main" noGrp="1"/>
+            <p:cNvPr id="11" name="">
+              <a:extLst xmlns:a="http://schemas.openxmlformats.org/drawingml/2006/main">
+                <a:ext uri="{FF2B5EF4-FFF2-40B4-BE49-F238E27FC236}">
+                  <a16:creationId xmlns:a16="http://schemas.microsoft.com/office/drawing/2014/main" id="{5375CEE7-3CA5-483F-87ED-9834C7A049BC}"/>
+                </a:ext>
+              </a:extLst>
+            </p:cNvPr>
+            <p:cNvSpPr>
+              <a:spLocks xmlns:a="http://schemas.openxmlformats.org/drawingml/2006/main"/>
             </p:cNvSpPr>
             <p:nvPr/>
           </p:nvSpPr>
@@ -5023,15 +4911,15 @@
         </p:sp>
         <p:sp>
           <p:nvSpPr>
-            <p:cNvPr id="14" name="">
-              <a:extLst xmlns:a="http://schemas.openxmlformats.org/drawingml/2006/main">
-                <a:ext uri="{FF2B5EF4-FFF2-40B4-BE49-F238E27FC236}">
-                  <a16:creationId xmlns:a16="http://schemas.microsoft.com/office/drawing/2014/main" id="{0BD3A53F-6E41-4E09-AEE9-B1DB856B22F9}"/>
-                </a:ext>
-              </a:extLst>
-            </p:cNvPr>
-            <p:cNvSpPr>
-              <a:spLocks xmlns:a="http://schemas.openxmlformats.org/drawingml/2006/main" noGrp="1"/>
+            <p:cNvPr id="12" name="">
+              <a:extLst xmlns:a="http://schemas.openxmlformats.org/drawingml/2006/main">
+                <a:ext uri="{FF2B5EF4-FFF2-40B4-BE49-F238E27FC236}">
+                  <a16:creationId xmlns:a16="http://schemas.microsoft.com/office/drawing/2014/main" id="{B3B84A4A-B0CD-4F4F-AE42-F1B8BFE84F3F}"/>
+                </a:ext>
+              </a:extLst>
+            </p:cNvPr>
+            <p:cNvSpPr>
+              <a:spLocks xmlns:a="http://schemas.openxmlformats.org/drawingml/2006/main"/>
             </p:cNvSpPr>
             <p:nvPr/>
           </p:nvSpPr>
@@ -5072,17 +4960,17 @@
                   <a:ea typeface="Times New Roman"/>
                   <a:cs typeface="Times New Roman"/>
                 </a:rPr>
-                <a:t>keeps usable data</a:t>
+                <a:t>positive views for contrastive learning</a:t>
               </a:r>
             </a:p>
           </p:txBody>
         </p:sp>
         <p:cxnSp>
           <p:nvCxnSpPr>
-            <p:cNvPr id="35" name=""/>
+            <p:cNvPr id="31" name=""/>
             <p:cNvCxnSpPr>
-              <a:stCxn xmlns:a="http://schemas.openxmlformats.org/drawingml/2006/main" id="3" idx="3"/>
-              <a:endCxn xmlns:a="http://schemas.openxmlformats.org/drawingml/2006/main" id="6" idx="1"/>
+              <a:stCxn xmlns:a="http://schemas.openxmlformats.org/drawingml/2006/main" id="1" idx="3"/>
+              <a:endCxn xmlns:a="http://schemas.openxmlformats.org/drawingml/2006/main" id="4" idx="1"/>
             </p:cNvCxnSpPr>
             <p:nvPr/>
           </p:nvCxnSpPr>
@@ -5099,16 +4987,16 @@
                 <a:srgbClr val="438B86"/>
               </a:solidFill>
               <a:prstDash val="solid"/>
-              <a:headEnd type="arrow" w="sm" len="sm"/>
+              <a:tailEnd type="arrow" w="sm" len="sm"/>
             </a:ln>
           </p:spPr>
         </p:cxnSp>
         <p:cxnSp>
           <p:nvCxnSpPr>
-            <p:cNvPr id="36" name=""/>
+            <p:cNvPr id="32" name=""/>
             <p:cNvCxnSpPr>
-              <a:stCxn xmlns:a="http://schemas.openxmlformats.org/drawingml/2006/main" id="6" idx="3"/>
-              <a:endCxn xmlns:a="http://schemas.openxmlformats.org/drawingml/2006/main" id="9" idx="1"/>
+              <a:stCxn xmlns:a="http://schemas.openxmlformats.org/drawingml/2006/main" id="4" idx="3"/>
+              <a:endCxn xmlns:a="http://schemas.openxmlformats.org/drawingml/2006/main" id="7" idx="1"/>
             </p:cNvCxnSpPr>
             <p:nvPr/>
           </p:nvCxnSpPr>
@@ -5125,16 +5013,16 @@
                 <a:srgbClr val="B77F2B"/>
               </a:solidFill>
               <a:prstDash val="solid"/>
-              <a:headEnd type="arrow" w="sm" len="sm"/>
+              <a:tailEnd type="arrow" w="sm" len="sm"/>
             </a:ln>
           </p:spPr>
         </p:cxnSp>
         <p:cxnSp>
           <p:nvCxnSpPr>
-            <p:cNvPr id="37" name=""/>
+            <p:cNvPr id="33" name=""/>
             <p:cNvCxnSpPr>
-              <a:stCxn xmlns:a="http://schemas.openxmlformats.org/drawingml/2006/main" id="9" idx="3"/>
-              <a:endCxn xmlns:a="http://schemas.openxmlformats.org/drawingml/2006/main" id="12" idx="1"/>
+              <a:stCxn xmlns:a="http://schemas.openxmlformats.org/drawingml/2006/main" id="7" idx="3"/>
+              <a:endCxn xmlns:a="http://schemas.openxmlformats.org/drawingml/2006/main" id="10" idx="1"/>
             </p:cNvCxnSpPr>
             <p:nvPr/>
           </p:nvCxnSpPr>
@@ -5151,47 +5039,63 @@
                 <a:srgbClr val="78639F"/>
               </a:solidFill>
               <a:prstDash val="solid"/>
-              <a:headEnd type="arrow" w="sm" len="sm"/>
+              <a:tailEnd type="arrow" w="sm" len="sm"/>
             </a:ln>
           </p:spPr>
         </p:cxnSp>
-        <p:cxnSp>
-          <p:nvCxnSpPr>
-            <p:cNvPr id="38" name=""/>
-            <p:cNvCxnSpPr>
-              <a:stCxn xmlns:a="http://schemas.openxmlformats.org/drawingml/2006/main" id="9" idx="3"/>
-              <a:endCxn xmlns:a="http://schemas.openxmlformats.org/drawingml/2006/main" id="3" idx="1"/>
-            </p:cNvCxnSpPr>
-            <p:nvPr/>
-          </p:nvCxnSpPr>
-          <p:spPr>
-            <a:xfrm xmlns:a="http://schemas.openxmlformats.org/drawingml/2006/main" flipH="1">
-              <a:off x="762000" y="2881313"/>
-              <a:ext cx="8382000" cy="0"/>
-            </a:xfrm>
-            <a:prstGeom xmlns:a="http://schemas.openxmlformats.org/drawingml/2006/main" prst="straightConnector1">
-              <a:avLst/>
-            </a:prstGeom>
+        <p:sp>
+          <p:nvSpPr>
+            <p:cNvPr id="34" name=""/>
+            <p:cNvSpPr/>
+            <p:nvPr/>
+          </p:nvSpPr>
+          <p:spPr>
+            <a:xfrm xmlns:a="http://schemas.openxmlformats.org/drawingml/2006/main">
+              <a:off x="1857375" y="3381375"/>
+              <a:ext cx="6191250" cy="571500"/>
+            </a:xfrm>
+            <ns0:custGeom xmlns:ns0="http://schemas.openxmlformats.org/drawingml/2006/main">
+              <ns0:avLst/>
+              <ns0:gdLst/>
+              <ns0:ahLst/>
+              <ns0:cxnLst/>
+              <ns0:pathLst>
+                <ns0:path w="6191250" h="571500" fill="none" stroke="1">
+                  <ns0:moveTo>
+                    <ns0:pt x="6191250" y="0"/>
+                  </ns0:moveTo>
+                  <ns0:lnTo>
+                    <ns0:pt x="6191250" y="571500"/>
+                  </ns0:lnTo>
+                  <ns0:lnTo>
+                    <ns0:pt x="0" y="571500"/>
+                  </ns0:lnTo>
+                  <ns0:lnTo>
+                    <ns0:pt x="0" y="0"/>
+                  </ns0:lnTo>
+                </ns0:path>
+              </ns0:pathLst>
+            </ns0:custGeom>
             <a:ln xmlns:a="http://schemas.openxmlformats.org/drawingml/2006/main" w="19050">
               <a:solidFill>
-                <a:srgbClr val="F3E2DE"/>
+                <a:srgbClr val="B77F2B"/>
               </a:solidFill>
               <a:prstDash val="dash"/>
-              <a:headEnd type="arrow" w="sm" len="sm"/>
-            </a:ln>
-          </p:spPr>
-        </p:cxnSp>
-        <p:sp>
-          <p:nvSpPr>
-            <p:cNvPr id="19" name="">
-              <a:extLst xmlns:a="http://schemas.openxmlformats.org/drawingml/2006/main">
-                <a:ext uri="{FF2B5EF4-FFF2-40B4-BE49-F238E27FC236}">
-                  <a16:creationId xmlns:a16="http://schemas.microsoft.com/office/drawing/2014/main" id="{A7F0EBBD-3BB2-4540-B084-2F3314C64CD4}"/>
-                </a:ext>
-              </a:extLst>
-            </p:cNvPr>
-            <p:cNvSpPr>
-              <a:spLocks xmlns:a="http://schemas.openxmlformats.org/drawingml/2006/main" noGrp="1"/>
+              <a:tailEnd type="arrow" w="sm" len="sm"/>
+            </a:ln>
+          </p:spPr>
+        </p:sp>
+        <p:sp>
+          <p:nvSpPr>
+            <p:cNvPr id="17" name="">
+              <a:extLst xmlns:a="http://schemas.openxmlformats.org/drawingml/2006/main">
+                <a:ext uri="{FF2B5EF4-FFF2-40B4-BE49-F238E27FC236}">
+                  <a16:creationId xmlns:a16="http://schemas.microsoft.com/office/drawing/2014/main" id="{06ED2271-112A-45C7-8FA8-C0D5F2D03EEB}"/>
+                </a:ext>
+              </a:extLst>
+            </p:cNvPr>
+            <p:cNvSpPr>
+              <a:spLocks xmlns:a="http://schemas.openxmlformats.org/drawingml/2006/main"/>
             </p:cNvSpPr>
             <p:nvPr/>
           </p:nvSpPr>
@@ -5232,22 +5136,22 @@
                   <a:ea typeface="Times New Roman"/>
                   <a:cs typeface="Times New Roman"/>
                 </a:rPr>
-                <a:t>retrieval  →  generation  →  review  →  downstream use</a:t>
+                <a:t/>
               </a:r>
             </a:p>
           </p:txBody>
         </p:sp>
         <p:sp>
           <p:nvSpPr>
-            <p:cNvPr id="20" name="">
-              <a:extLst xmlns:a="http://schemas.openxmlformats.org/drawingml/2006/main">
-                <a:ext uri="{FF2B5EF4-FFF2-40B4-BE49-F238E27FC236}">
-                  <a16:creationId xmlns:a16="http://schemas.microsoft.com/office/drawing/2014/main" id="{F4691BE5-7073-4BB8-A4EC-CB6F0A2D19C2}"/>
-                </a:ext>
-              </a:extLst>
-            </p:cNvPr>
-            <p:cNvSpPr>
-              <a:spLocks xmlns:a="http://schemas.openxmlformats.org/drawingml/2006/main" noGrp="1"/>
+            <p:cNvPr id="18" name="">
+              <a:extLst xmlns:a="http://schemas.openxmlformats.org/drawingml/2006/main">
+                <a:ext uri="{FF2B5EF4-FFF2-40B4-BE49-F238E27FC236}">
+                  <a16:creationId xmlns:a16="http://schemas.microsoft.com/office/drawing/2014/main" id="{221246F0-B37A-4182-B1B1-2F9503A17536}"/>
+                </a:ext>
+              </a:extLst>
+            </p:cNvPr>
+            <p:cNvSpPr>
+              <a:spLocks xmlns:a="http://schemas.openxmlformats.org/drawingml/2006/main"/>
             </p:cNvSpPr>
             <p:nvPr/>
           </p:nvSpPr>
@@ -5288,7 +5192,7 @@
                   <a:ea typeface="Times New Roman"/>
                   <a:cs typeface="Times New Roman"/>
                 </a:rPr>
-                <a:t>Temporal fidelity: dependence, missingness, distribution  |  Utility: downstream task performance</a:t>
+                <a:t/>
               </a:r>
             </a:p>
           </p:txBody>
@@ -5297,7 +5201,7 @@
     </p:spTree>
     <p:extLst>
       <p:ext uri="{BB962C8B-B14F-4D97-AF65-F5344CB8AC3E}">
-        <p14:creationId xmlns:p14="http://schemas.microsoft.com/office/powerpoint/2010/main" val="1948270866"/>
+        <p14:creationId xmlns:p14="http://schemas.microsoft.com/office/powerpoint/2010/main" val="1917170435"/>
       </p:ext>
     </p:extLst>
   </p:cSld>
@@ -5325,7 +5229,7 @@
       </p:grpSpPr>
       <p:grpSp>
         <p:nvGrpSpPr>
-          <p:cNvPr id="39" name="group-remaining-components"/>
+          <p:cNvPr id="35" name="group-remaining-components"/>
           <p:cNvGrpSpPr/>
           <p:nvPr/>
         </p:nvGrpSpPr>
@@ -5339,127 +5243,15 @@
         </p:grpSpPr>
         <p:sp>
           <p:nvSpPr>
-            <p:cNvPr id="22" name="">
-              <a:extLst xmlns:a="http://schemas.openxmlformats.org/drawingml/2006/main">
-                <a:ext uri="{FF2B5EF4-FFF2-40B4-BE49-F238E27FC236}">
-                  <a16:creationId xmlns:a16="http://schemas.microsoft.com/office/drawing/2014/main" id="{0C9D3564-270E-4AB5-92F7-70D570EC65E6}"/>
-                </a:ext>
-              </a:extLst>
-            </p:cNvPr>
-            <p:cNvSpPr>
-              <a:spLocks xmlns:a="http://schemas.openxmlformats.org/drawingml/2006/main" noGrp="1"/>
-            </p:cNvSpPr>
-            <p:nvPr/>
-          </p:nvSpPr>
-          <p:spPr>
-            <a:xfrm xmlns:a="http://schemas.openxmlformats.org/drawingml/2006/main">
-              <a:off x="476250" y="228600"/>
-              <a:ext cx="11239500" cy="381000"/>
-            </a:xfrm>
-            <a:prstGeom xmlns:a="http://schemas.openxmlformats.org/drawingml/2006/main" prst="rect">
-              <a:avLst/>
-            </a:prstGeom>
-            <a:noFill xmlns:a="http://schemas.openxmlformats.org/drawingml/2006/main"/>
-            <a:ln xmlns:a="http://schemas.openxmlformats.org/drawingml/2006/main" w="0">
-              <a:noFill/>
-              <a:prstDash val="solid"/>
-            </a:ln>
-          </p:spPr>
-          <p:txBody>
-            <a:bodyPr xmlns:a="http://schemas.openxmlformats.org/drawingml/2006/main"/>
-            <a:lstStyle xmlns:a="http://schemas.openxmlformats.org/drawingml/2006/main"/>
-            <a:p xmlns:a="http://schemas.openxmlformats.org/drawingml/2006/main">
-              <a:pPr>
-                <a:defRPr sz="2400" b="1" i="0">
-                  <a:solidFill>
-                    <a:srgbClr val="24324A"/>
-                  </a:solidFill>
-                  <a:latin typeface="Times New Roman"/>
-                  <a:ea typeface="Times New Roman"/>
-                  <a:cs typeface="Times New Roman"/>
-                </a:defRPr>
-              </a:pPr>
-              <a:r>
-                <a:rPr sz="2400" b="1" i="0">
-                  <a:solidFill>
-                    <a:srgbClr val="24324A"/>
-                  </a:solidFill>
-                  <a:latin typeface="Times New Roman"/>
-                  <a:ea typeface="Times New Roman"/>
-                  <a:cs typeface="Times New Roman"/>
-                </a:rPr>
-                <a:t>Coarse-to-fine anomaly diagnosis</a:t>
-              </a:r>
-            </a:p>
-          </p:txBody>
-        </p:sp>
-        <p:sp>
-          <p:nvSpPr>
-            <p:cNvPr id="2" name="">
-              <a:extLst xmlns:a="http://schemas.openxmlformats.org/drawingml/2006/main">
-                <a:ext uri="{FF2B5EF4-FFF2-40B4-BE49-F238E27FC236}">
-                  <a16:creationId xmlns:a16="http://schemas.microsoft.com/office/drawing/2014/main" id="{60C9A613-C954-4126-99DA-F00F97211D88}"/>
-                </a:ext>
-              </a:extLst>
-            </p:cNvPr>
-            <p:cNvSpPr>
-              <a:spLocks xmlns:a="http://schemas.openxmlformats.org/drawingml/2006/main" noGrp="1"/>
-            </p:cNvSpPr>
-            <p:nvPr/>
-          </p:nvSpPr>
-          <p:spPr>
-            <a:xfrm xmlns:a="http://schemas.openxmlformats.org/drawingml/2006/main">
-              <a:off x="476250" y="647700"/>
-              <a:ext cx="11239500" cy="238125"/>
-            </a:xfrm>
-            <a:prstGeom xmlns:a="http://schemas.openxmlformats.org/drawingml/2006/main" prst="rect">
-              <a:avLst/>
-            </a:prstGeom>
-            <a:noFill xmlns:a="http://schemas.openxmlformats.org/drawingml/2006/main"/>
-            <a:ln xmlns:a="http://schemas.openxmlformats.org/drawingml/2006/main" w="0">
-              <a:noFill/>
-              <a:prstDash val="solid"/>
-            </a:ln>
-          </p:spPr>
-          <p:txBody>
-            <a:bodyPr xmlns:a="http://schemas.openxmlformats.org/drawingml/2006/main"/>
-            <a:lstStyle xmlns:a="http://schemas.openxmlformats.org/drawingml/2006/main"/>
-            <a:p xmlns:a="http://schemas.openxmlformats.org/drawingml/2006/main">
-              <a:pPr>
-                <a:defRPr sz="1125" b="0" i="1">
-                  <a:solidFill>
-                    <a:srgbClr val="687386"/>
-                  </a:solidFill>
-                  <a:latin typeface="Times New Roman"/>
-                  <a:ea typeface="Times New Roman"/>
-                  <a:cs typeface="Times New Roman"/>
-                </a:defRPr>
-              </a:pPr>
-              <a:r>
-                <a:rPr sz="1125" b="0" i="1">
-                  <a:solidFill>
-                    <a:srgbClr val="687386"/>
-                  </a:solidFill>
-                  <a:latin typeface="Times New Roman"/>
-                  <a:ea typeface="Times New Roman"/>
-                  <a:cs typeface="Times New Roman"/>
-                </a:rPr>
-                <a:t>Evidence acquisition and iterative refinement connect detection to a diagnosis and a final alert.</a:t>
-              </a:r>
-            </a:p>
-          </p:txBody>
-        </p:sp>
-        <p:sp>
-          <p:nvSpPr>
-            <p:cNvPr id="3" name="">
-              <a:extLst xmlns:a="http://schemas.openxmlformats.org/drawingml/2006/main">
-                <a:ext uri="{FF2B5EF4-FFF2-40B4-BE49-F238E27FC236}">
-                  <a16:creationId xmlns:a16="http://schemas.microsoft.com/office/drawing/2014/main" id="{822224C6-F3DE-44B6-91D0-DD3208164D92}"/>
-                </a:ext>
-              </a:extLst>
-            </p:cNvPr>
-            <p:cNvSpPr>
-              <a:spLocks xmlns:a="http://schemas.openxmlformats.org/drawingml/2006/main" noGrp="1"/>
+            <p:cNvPr id="20" name="">
+              <a:extLst xmlns:a="http://schemas.openxmlformats.org/drawingml/2006/main">
+                <a:ext uri="{FF2B5EF4-FFF2-40B4-BE49-F238E27FC236}">
+                  <a16:creationId xmlns:a16="http://schemas.microsoft.com/office/drawing/2014/main" id="{FEF69D22-4DA9-4F85-A9F5-CA4B993EE732}"/>
+                </a:ext>
+              </a:extLst>
+            </p:cNvPr>
+            <p:cNvSpPr>
+              <a:spLocks xmlns:a="http://schemas.openxmlformats.org/drawingml/2006/main"/>
             </p:cNvSpPr>
             <p:nvPr/>
           </p:nvSpPr>
@@ -5486,15 +5278,15 @@
         </p:sp>
         <p:sp>
           <p:nvSpPr>
-            <p:cNvPr id="4" name="">
-              <a:extLst xmlns:a="http://schemas.openxmlformats.org/drawingml/2006/main">
-                <a:ext uri="{FF2B5EF4-FFF2-40B4-BE49-F238E27FC236}">
-                  <a16:creationId xmlns:a16="http://schemas.microsoft.com/office/drawing/2014/main" id="{8C80698B-985B-4CFD-BD23-53B864C4E055}"/>
-                </a:ext>
-              </a:extLst>
-            </p:cNvPr>
-            <p:cNvSpPr>
-              <a:spLocks xmlns:a="http://schemas.openxmlformats.org/drawingml/2006/main" noGrp="1"/>
+            <p:cNvPr id="2" name="">
+              <a:extLst xmlns:a="http://schemas.openxmlformats.org/drawingml/2006/main">
+                <a:ext uri="{FF2B5EF4-FFF2-40B4-BE49-F238E27FC236}">
+                  <a16:creationId xmlns:a16="http://schemas.microsoft.com/office/drawing/2014/main" id="{7AA180A0-1412-437F-9CD6-A0517A50EF1E}"/>
+                </a:ext>
+              </a:extLst>
+            </p:cNvPr>
+            <p:cNvSpPr>
+              <a:spLocks xmlns:a="http://schemas.openxmlformats.org/drawingml/2006/main"/>
             </p:cNvSpPr>
             <p:nvPr/>
           </p:nvSpPr>
@@ -5542,15 +5334,15 @@
         </p:sp>
         <p:sp>
           <p:nvSpPr>
-            <p:cNvPr id="5" name="">
-              <a:extLst xmlns:a="http://schemas.openxmlformats.org/drawingml/2006/main">
-                <a:ext uri="{FF2B5EF4-FFF2-40B4-BE49-F238E27FC236}">
-                  <a16:creationId xmlns:a16="http://schemas.microsoft.com/office/drawing/2014/main" id="{26B4E1AE-C756-4849-AC5D-3C17933DCC14}"/>
-                </a:ext>
-              </a:extLst>
-            </p:cNvPr>
-            <p:cNvSpPr>
-              <a:spLocks xmlns:a="http://schemas.openxmlformats.org/drawingml/2006/main" noGrp="1"/>
+            <p:cNvPr id="3" name="">
+              <a:extLst xmlns:a="http://schemas.openxmlformats.org/drawingml/2006/main">
+                <a:ext uri="{FF2B5EF4-FFF2-40B4-BE49-F238E27FC236}">
+                  <a16:creationId xmlns:a16="http://schemas.microsoft.com/office/drawing/2014/main" id="{0BDBACBF-9000-431A-9E70-553FF712D774}"/>
+                </a:ext>
+              </a:extLst>
+            </p:cNvPr>
+            <p:cNvSpPr>
+              <a:spLocks xmlns:a="http://schemas.openxmlformats.org/drawingml/2006/main"/>
             </p:cNvSpPr>
             <p:nvPr/>
           </p:nvSpPr>
@@ -5598,15 +5390,15 @@
         </p:sp>
         <p:sp>
           <p:nvSpPr>
-            <p:cNvPr id="6" name="">
-              <a:extLst xmlns:a="http://schemas.openxmlformats.org/drawingml/2006/main">
-                <a:ext uri="{FF2B5EF4-FFF2-40B4-BE49-F238E27FC236}">
-                  <a16:creationId xmlns:a16="http://schemas.microsoft.com/office/drawing/2014/main" id="{6F1692A9-4962-4C6B-976A-140BDBD701CE}"/>
-                </a:ext>
-              </a:extLst>
-            </p:cNvPr>
-            <p:cNvSpPr>
-              <a:spLocks xmlns:a="http://schemas.openxmlformats.org/drawingml/2006/main" noGrp="1"/>
+            <p:cNvPr id="4" name="">
+              <a:extLst xmlns:a="http://schemas.openxmlformats.org/drawingml/2006/main">
+                <a:ext uri="{FF2B5EF4-FFF2-40B4-BE49-F238E27FC236}">
+                  <a16:creationId xmlns:a16="http://schemas.microsoft.com/office/drawing/2014/main" id="{59039F02-9D19-4BCC-A33B-3ABA2A627F4F}"/>
+                </a:ext>
+              </a:extLst>
+            </p:cNvPr>
+            <p:cNvSpPr>
+              <a:spLocks xmlns:a="http://schemas.openxmlformats.org/drawingml/2006/main"/>
             </p:cNvSpPr>
             <p:nvPr/>
           </p:nvSpPr>
@@ -5633,22 +5425,22 @@
         </p:sp>
         <p:sp>
           <p:nvSpPr>
-            <p:cNvPr id="7" name="">
-              <a:extLst xmlns:a="http://schemas.openxmlformats.org/drawingml/2006/main">
-                <a:ext uri="{FF2B5EF4-FFF2-40B4-BE49-F238E27FC236}">
-                  <a16:creationId xmlns:a16="http://schemas.microsoft.com/office/drawing/2014/main" id="{40084019-0D6B-4DE5-AC76-D4ACCD82A6D5}"/>
-                </a:ext>
-              </a:extLst>
-            </p:cNvPr>
-            <p:cNvSpPr>
-              <a:spLocks xmlns:a="http://schemas.openxmlformats.org/drawingml/2006/main" noGrp="1"/>
+            <p:cNvPr id="5" name="">
+              <a:extLst xmlns:a="http://schemas.openxmlformats.org/drawingml/2006/main">
+                <a:ext uri="{FF2B5EF4-FFF2-40B4-BE49-F238E27FC236}">
+                  <a16:creationId xmlns:a16="http://schemas.microsoft.com/office/drawing/2014/main" id="{2B072089-7363-4F16-B170-DD3F5F1840A1}"/>
+                </a:ext>
+              </a:extLst>
+            </p:cNvPr>
+            <p:cNvSpPr>
+              <a:spLocks xmlns:a="http://schemas.openxmlformats.org/drawingml/2006/main"/>
             </p:cNvSpPr>
             <p:nvPr/>
           </p:nvSpPr>
           <p:spPr>
             <a:xfrm xmlns:a="http://schemas.openxmlformats.org/drawingml/2006/main">
               <a:off x="3429000" y="2571750"/>
-              <a:ext cx="2095500" cy="266700"/>
+              <a:ext cx="2095500" cy="457200"/>
             </a:xfrm>
             <a:prstGeom xmlns:a="http://schemas.openxmlformats.org/drawingml/2006/main" prst="rect">
               <a:avLst/>
@@ -5682,29 +5474,29 @@
                   <a:ea typeface="Times New Roman"/>
                   <a:cs typeface="Times New Roman"/>
                 </a:rPr>
-                <a:t>Evidence construction</a:t>
+                <a:t>Adaptive evidence construction</a:t>
               </a:r>
             </a:p>
           </p:txBody>
         </p:sp>
         <p:sp>
           <p:nvSpPr>
-            <p:cNvPr id="8" name="">
-              <a:extLst xmlns:a="http://schemas.openxmlformats.org/drawingml/2006/main">
-                <a:ext uri="{FF2B5EF4-FFF2-40B4-BE49-F238E27FC236}">
-                  <a16:creationId xmlns:a16="http://schemas.microsoft.com/office/drawing/2014/main" id="{B5D80B73-D20B-459E-9C44-04C65C7CF41E}"/>
-                </a:ext>
-              </a:extLst>
-            </p:cNvPr>
-            <p:cNvSpPr>
-              <a:spLocks xmlns:a="http://schemas.openxmlformats.org/drawingml/2006/main" noGrp="1"/>
-            </p:cNvSpPr>
-            <p:nvPr/>
-          </p:nvSpPr>
-          <p:spPr>
-            <a:xfrm xmlns:a="http://schemas.openxmlformats.org/drawingml/2006/main">
-              <a:off x="3448050" y="2876550"/>
-              <a:ext cx="2057400" cy="619125"/>
+            <p:cNvPr id="6" name="">
+              <a:extLst xmlns:a="http://schemas.openxmlformats.org/drawingml/2006/main">
+                <a:ext uri="{FF2B5EF4-FFF2-40B4-BE49-F238E27FC236}">
+                  <a16:creationId xmlns:a16="http://schemas.microsoft.com/office/drawing/2014/main" id="{94BD43F2-B306-46BA-813E-82844392F2C3}"/>
+                </a:ext>
+              </a:extLst>
+            </p:cNvPr>
+            <p:cNvSpPr>
+              <a:spLocks xmlns:a="http://schemas.openxmlformats.org/drawingml/2006/main"/>
+            </p:cNvSpPr>
+            <p:nvPr/>
+          </p:nvSpPr>
+          <p:spPr>
+            <a:xfrm xmlns:a="http://schemas.openxmlformats.org/drawingml/2006/main">
+              <a:off x="3448050" y="3124200"/>
+              <a:ext cx="2057400" cy="371475"/>
             </a:xfrm>
             <a:prstGeom xmlns:a="http://schemas.openxmlformats.org/drawingml/2006/main" prst="rect">
               <a:avLst/>
@@ -5738,22 +5530,22 @@
                   <a:ea typeface="Times New Roman"/>
                   <a:cs typeface="Times New Roman"/>
                 </a:rPr>
-                <a:t>align and summarize evidence</a:t>
+                <a:t>construct diagnostic evidence</a:t>
               </a:r>
             </a:p>
           </p:txBody>
         </p:sp>
         <p:sp>
           <p:nvSpPr>
-            <p:cNvPr id="9" name="">
-              <a:extLst xmlns:a="http://schemas.openxmlformats.org/drawingml/2006/main">
-                <a:ext uri="{FF2B5EF4-FFF2-40B4-BE49-F238E27FC236}">
-                  <a16:creationId xmlns:a16="http://schemas.microsoft.com/office/drawing/2014/main" id="{EFD31150-9CAF-48B2-AE52-326F35DD3379}"/>
-                </a:ext>
-              </a:extLst>
-            </p:cNvPr>
-            <p:cNvSpPr>
-              <a:spLocks xmlns:a="http://schemas.openxmlformats.org/drawingml/2006/main" noGrp="1"/>
+            <p:cNvPr id="7" name="">
+              <a:extLst xmlns:a="http://schemas.openxmlformats.org/drawingml/2006/main">
+                <a:ext uri="{FF2B5EF4-FFF2-40B4-BE49-F238E27FC236}">
+                  <a16:creationId xmlns:a16="http://schemas.microsoft.com/office/drawing/2014/main" id="{9DC32BD0-DF1E-4736-B568-C38251B848C2}"/>
+                </a:ext>
+              </a:extLst>
+            </p:cNvPr>
+            <p:cNvSpPr>
+              <a:spLocks xmlns:a="http://schemas.openxmlformats.org/drawingml/2006/main"/>
             </p:cNvSpPr>
             <p:nvPr/>
           </p:nvSpPr>
@@ -5780,15 +5572,15 @@
         </p:sp>
         <p:sp>
           <p:nvSpPr>
-            <p:cNvPr id="10" name="">
-              <a:extLst xmlns:a="http://schemas.openxmlformats.org/drawingml/2006/main">
-                <a:ext uri="{FF2B5EF4-FFF2-40B4-BE49-F238E27FC236}">
-                  <a16:creationId xmlns:a16="http://schemas.microsoft.com/office/drawing/2014/main" id="{3718C8FF-B5AA-42E8-9E56-3DBDFBF7348B}"/>
-                </a:ext>
-              </a:extLst>
-            </p:cNvPr>
-            <p:cNvSpPr>
-              <a:spLocks xmlns:a="http://schemas.openxmlformats.org/drawingml/2006/main" noGrp="1"/>
+            <p:cNvPr id="8" name="">
+              <a:extLst xmlns:a="http://schemas.openxmlformats.org/drawingml/2006/main">
+                <a:ext uri="{FF2B5EF4-FFF2-40B4-BE49-F238E27FC236}">
+                  <a16:creationId xmlns:a16="http://schemas.microsoft.com/office/drawing/2014/main" id="{0B2D05D2-E533-4A70-9139-A004B5783202}"/>
+                </a:ext>
+              </a:extLst>
+            </p:cNvPr>
+            <p:cNvSpPr>
+              <a:spLocks xmlns:a="http://schemas.openxmlformats.org/drawingml/2006/main"/>
             </p:cNvSpPr>
             <p:nvPr/>
           </p:nvSpPr>
@@ -5836,15 +5628,15 @@
         </p:sp>
         <p:sp>
           <p:nvSpPr>
-            <p:cNvPr id="11" name="">
-              <a:extLst xmlns:a="http://schemas.openxmlformats.org/drawingml/2006/main">
-                <a:ext uri="{FF2B5EF4-FFF2-40B4-BE49-F238E27FC236}">
-                  <a16:creationId xmlns:a16="http://schemas.microsoft.com/office/drawing/2014/main" id="{6FC3EB7E-3A1A-413A-BC70-E75EA23C7C30}"/>
-                </a:ext>
-              </a:extLst>
-            </p:cNvPr>
-            <p:cNvSpPr>
-              <a:spLocks xmlns:a="http://schemas.openxmlformats.org/drawingml/2006/main" noGrp="1"/>
+            <p:cNvPr id="9" name="">
+              <a:extLst xmlns:a="http://schemas.openxmlformats.org/drawingml/2006/main">
+                <a:ext uri="{FF2B5EF4-FFF2-40B4-BE49-F238E27FC236}">
+                  <a16:creationId xmlns:a16="http://schemas.microsoft.com/office/drawing/2014/main" id="{F77169F1-06CD-4C21-A59B-02C726176CD3}"/>
+                </a:ext>
+              </a:extLst>
+            </p:cNvPr>
+            <p:cNvSpPr>
+              <a:spLocks xmlns:a="http://schemas.openxmlformats.org/drawingml/2006/main"/>
             </p:cNvSpPr>
             <p:nvPr/>
           </p:nvSpPr>
@@ -5892,15 +5684,15 @@
         </p:sp>
         <p:sp>
           <p:nvSpPr>
-            <p:cNvPr id="12" name="">
-              <a:extLst xmlns:a="http://schemas.openxmlformats.org/drawingml/2006/main">
-                <a:ext uri="{FF2B5EF4-FFF2-40B4-BE49-F238E27FC236}">
-                  <a16:creationId xmlns:a16="http://schemas.microsoft.com/office/drawing/2014/main" id="{95466483-917A-4E50-A464-756828DAEB1C}"/>
-                </a:ext>
-              </a:extLst>
-            </p:cNvPr>
-            <p:cNvSpPr>
-              <a:spLocks xmlns:a="http://schemas.openxmlformats.org/drawingml/2006/main" noGrp="1"/>
+            <p:cNvPr id="10" name="">
+              <a:extLst xmlns:a="http://schemas.openxmlformats.org/drawingml/2006/main">
+                <a:ext uri="{FF2B5EF4-FFF2-40B4-BE49-F238E27FC236}">
+                  <a16:creationId xmlns:a16="http://schemas.microsoft.com/office/drawing/2014/main" id="{E07E7F93-A204-49FC-BEAD-91DC6192EBE3}"/>
+                </a:ext>
+              </a:extLst>
+            </p:cNvPr>
+            <p:cNvSpPr>
+              <a:spLocks xmlns:a="http://schemas.openxmlformats.org/drawingml/2006/main"/>
             </p:cNvSpPr>
             <p:nvPr/>
           </p:nvSpPr>
@@ -5927,15 +5719,15 @@
         </p:sp>
         <p:sp>
           <p:nvSpPr>
-            <p:cNvPr id="13" name="">
-              <a:extLst xmlns:a="http://schemas.openxmlformats.org/drawingml/2006/main">
-                <a:ext uri="{FF2B5EF4-FFF2-40B4-BE49-F238E27FC236}">
-                  <a16:creationId xmlns:a16="http://schemas.microsoft.com/office/drawing/2014/main" id="{B63BFA5D-1406-4249-B41B-BB446F7D08BE}"/>
-                </a:ext>
-              </a:extLst>
-            </p:cNvPr>
-            <p:cNvSpPr>
-              <a:spLocks xmlns:a="http://schemas.openxmlformats.org/drawingml/2006/main" noGrp="1"/>
+            <p:cNvPr id="11" name="">
+              <a:extLst xmlns:a="http://schemas.openxmlformats.org/drawingml/2006/main">
+                <a:ext uri="{FF2B5EF4-FFF2-40B4-BE49-F238E27FC236}">
+                  <a16:creationId xmlns:a16="http://schemas.microsoft.com/office/drawing/2014/main" id="{3C44ED09-291E-4CEF-80CE-1FEFAF7C4F45}"/>
+                </a:ext>
+              </a:extLst>
+            </p:cNvPr>
+            <p:cNvSpPr>
+              <a:spLocks xmlns:a="http://schemas.openxmlformats.org/drawingml/2006/main"/>
             </p:cNvSpPr>
             <p:nvPr/>
           </p:nvSpPr>
@@ -5976,22 +5768,22 @@
                   <a:ea typeface="Times New Roman"/>
                   <a:cs typeface="Times New Roman"/>
                 </a:rPr>
-                <a:t>Diagnosis</a:t>
+                <a:t>Iterative refinement</a:t>
               </a:r>
             </a:p>
           </p:txBody>
         </p:sp>
         <p:sp>
           <p:nvSpPr>
-            <p:cNvPr id="14" name="">
-              <a:extLst xmlns:a="http://schemas.openxmlformats.org/drawingml/2006/main">
-                <a:ext uri="{FF2B5EF4-FFF2-40B4-BE49-F238E27FC236}">
-                  <a16:creationId xmlns:a16="http://schemas.microsoft.com/office/drawing/2014/main" id="{4A6DDA81-9187-41FC-9DE5-9B894D464A65}"/>
-                </a:ext>
-              </a:extLst>
-            </p:cNvPr>
-            <p:cNvSpPr>
-              <a:spLocks xmlns:a="http://schemas.openxmlformats.org/drawingml/2006/main" noGrp="1"/>
+            <p:cNvPr id="12" name="">
+              <a:extLst xmlns:a="http://schemas.openxmlformats.org/drawingml/2006/main">
+                <a:ext uri="{FF2B5EF4-FFF2-40B4-BE49-F238E27FC236}">
+                  <a16:creationId xmlns:a16="http://schemas.microsoft.com/office/drawing/2014/main" id="{EF429A76-4B27-43B8-A278-89A4FB920E7E}"/>
+                </a:ext>
+              </a:extLst>
+            </p:cNvPr>
+            <p:cNvSpPr>
+              <a:spLocks xmlns:a="http://schemas.openxmlformats.org/drawingml/2006/main"/>
             </p:cNvSpPr>
             <p:nvPr/>
           </p:nvSpPr>
@@ -6032,17 +5824,17 @@
                   <a:ea typeface="Times New Roman"/>
                   <a:cs typeface="Times New Roman"/>
                 </a:rPr>
-                <a:t>identify cause and confidence</a:t>
+                <a:t>refine anomaly intervals</a:t>
               </a:r>
             </a:p>
           </p:txBody>
         </p:sp>
         <p:cxnSp>
           <p:nvCxnSpPr>
-            <p:cNvPr id="36" name=""/>
+            <p:cNvPr id="32" name=""/>
             <p:cNvCxnSpPr>
-              <a:stCxn xmlns:a="http://schemas.openxmlformats.org/drawingml/2006/main" id="3" idx="3"/>
-              <a:endCxn xmlns:a="http://schemas.openxmlformats.org/drawingml/2006/main" id="6" idx="1"/>
+              <a:stCxn xmlns:a="http://schemas.openxmlformats.org/drawingml/2006/main" id="1" idx="3"/>
+              <a:endCxn xmlns:a="http://schemas.openxmlformats.org/drawingml/2006/main" id="4" idx="1"/>
             </p:cNvCxnSpPr>
             <p:nvPr/>
           </p:nvCxnSpPr>
@@ -6059,16 +5851,16 @@
                 <a:srgbClr val="438B86"/>
               </a:solidFill>
               <a:prstDash val="solid"/>
-              <a:headEnd type="arrow" w="sm" len="sm"/>
+              <a:tailEnd type="arrow" w="sm" len="sm"/>
             </a:ln>
           </p:spPr>
         </p:cxnSp>
         <p:cxnSp>
           <p:nvCxnSpPr>
-            <p:cNvPr id="37" name=""/>
+            <p:cNvPr id="33" name=""/>
             <p:cNvCxnSpPr>
-              <a:stCxn xmlns:a="http://schemas.openxmlformats.org/drawingml/2006/main" id="6" idx="3"/>
-              <a:endCxn xmlns:a="http://schemas.openxmlformats.org/drawingml/2006/main" id="9" idx="1"/>
+              <a:stCxn xmlns:a="http://schemas.openxmlformats.org/drawingml/2006/main" id="4" idx="3"/>
+              <a:endCxn xmlns:a="http://schemas.openxmlformats.org/drawingml/2006/main" id="7" idx="1"/>
             </p:cNvCxnSpPr>
             <p:nvPr/>
           </p:nvCxnSpPr>
@@ -6085,16 +5877,16 @@
                 <a:srgbClr val="438B86"/>
               </a:solidFill>
               <a:prstDash val="solid"/>
-              <a:headEnd type="arrow" w="sm" len="sm"/>
+              <a:tailEnd type="arrow" w="sm" len="sm"/>
             </a:ln>
           </p:spPr>
         </p:cxnSp>
         <p:cxnSp>
           <p:nvCxnSpPr>
-            <p:cNvPr id="38" name=""/>
+            <p:cNvPr id="34" name=""/>
             <p:cNvCxnSpPr>
-              <a:stCxn xmlns:a="http://schemas.openxmlformats.org/drawingml/2006/main" id="9" idx="3"/>
-              <a:endCxn xmlns:a="http://schemas.openxmlformats.org/drawingml/2006/main" id="12" idx="1"/>
+              <a:stCxn xmlns:a="http://schemas.openxmlformats.org/drawingml/2006/main" id="7" idx="3"/>
+              <a:endCxn xmlns:a="http://schemas.openxmlformats.org/drawingml/2006/main" id="10" idx="1"/>
             </p:cNvCxnSpPr>
             <p:nvPr/>
           </p:nvCxnSpPr>
@@ -6111,21 +5903,21 @@
                 <a:srgbClr val="B77F2B"/>
               </a:solidFill>
               <a:prstDash val="solid"/>
-              <a:headEnd type="arrow" w="sm" len="sm"/>
+              <a:tailEnd type="arrow" w="sm" len="sm"/>
             </a:ln>
           </p:spPr>
         </p:cxnSp>
         <p:sp>
           <p:nvSpPr>
-            <p:cNvPr id="18" name="">
-              <a:extLst xmlns:a="http://schemas.openxmlformats.org/drawingml/2006/main">
-                <a:ext uri="{FF2B5EF4-FFF2-40B4-BE49-F238E27FC236}">
-                  <a16:creationId xmlns:a16="http://schemas.microsoft.com/office/drawing/2014/main" id="{5E1C884F-607C-4037-AC69-D0F07BFFAFE6}"/>
-                </a:ext>
-              </a:extLst>
-            </p:cNvPr>
-            <p:cNvSpPr>
-              <a:spLocks xmlns:a="http://schemas.openxmlformats.org/drawingml/2006/main" noGrp="1"/>
+            <p:cNvPr id="16" name="">
+              <a:extLst xmlns:a="http://schemas.openxmlformats.org/drawingml/2006/main">
+                <a:ext uri="{FF2B5EF4-FFF2-40B4-BE49-F238E27FC236}">
+                  <a16:creationId xmlns:a16="http://schemas.microsoft.com/office/drawing/2014/main" id="{F2541FA1-FA0D-45A2-8399-FDD39A399923}"/>
+                </a:ext>
+              </a:extLst>
+            </p:cNvPr>
+            <p:cNvSpPr>
+              <a:spLocks xmlns:a="http://schemas.openxmlformats.org/drawingml/2006/main"/>
             </p:cNvSpPr>
             <p:nvPr/>
           </p:nvSpPr>
@@ -6152,15 +5944,15 @@
         </p:sp>
         <p:sp>
           <p:nvSpPr>
-            <p:cNvPr id="19" name="">
-              <a:extLst xmlns:a="http://schemas.openxmlformats.org/drawingml/2006/main">
-                <a:ext uri="{FF2B5EF4-FFF2-40B4-BE49-F238E27FC236}">
-                  <a16:creationId xmlns:a16="http://schemas.microsoft.com/office/drawing/2014/main" id="{57394A6E-ABF2-424C-ABF5-BE7326265315}"/>
-                </a:ext>
-              </a:extLst>
-            </p:cNvPr>
-            <p:cNvSpPr>
-              <a:spLocks xmlns:a="http://schemas.openxmlformats.org/drawingml/2006/main" noGrp="1"/>
+            <p:cNvPr id="17" name="">
+              <a:extLst xmlns:a="http://schemas.openxmlformats.org/drawingml/2006/main">
+                <a:ext uri="{FF2B5EF4-FFF2-40B4-BE49-F238E27FC236}">
+                  <a16:creationId xmlns:a16="http://schemas.microsoft.com/office/drawing/2014/main" id="{9AC80899-19F7-46D4-BA3A-2450ABF92BC7}"/>
+                </a:ext>
+              </a:extLst>
+            </p:cNvPr>
+            <p:cNvSpPr>
+              <a:spLocks xmlns:a="http://schemas.openxmlformats.org/drawingml/2006/main"/>
             </p:cNvSpPr>
             <p:nvPr/>
           </p:nvSpPr>
@@ -6201,22 +5993,22 @@
                   <a:ea typeface="Times New Roman"/>
                   <a:cs typeface="Times New Roman"/>
                 </a:rPr>
-                <a:t>training and feedback update the detector, diagnostic tools, and review policy</a:t>
+                <a:t>Detector training with rule-based rewards</a:t>
               </a:r>
             </a:p>
           </p:txBody>
         </p:sp>
         <p:sp>
           <p:nvSpPr>
-            <p:cNvPr id="20" name="">
-              <a:extLst xmlns:a="http://schemas.openxmlformats.org/drawingml/2006/main">
-                <a:ext uri="{FF2B5EF4-FFF2-40B4-BE49-F238E27FC236}">
-                  <a16:creationId xmlns:a16="http://schemas.microsoft.com/office/drawing/2014/main" id="{398109DF-428A-4E7F-986E-C00E3605E2FE}"/>
-                </a:ext>
-              </a:extLst>
-            </p:cNvPr>
-            <p:cNvSpPr>
-              <a:spLocks xmlns:a="http://schemas.openxmlformats.org/drawingml/2006/main" noGrp="1"/>
+            <p:cNvPr id="18" name="">
+              <a:extLst xmlns:a="http://schemas.openxmlformats.org/drawingml/2006/main">
+                <a:ext uri="{FF2B5EF4-FFF2-40B4-BE49-F238E27FC236}">
+                  <a16:creationId xmlns:a16="http://schemas.microsoft.com/office/drawing/2014/main" id="{B4E583EF-1057-44B0-8634-1631416F13EE}"/>
+                </a:ext>
+              </a:extLst>
+            </p:cNvPr>
+            <p:cNvSpPr>
+              <a:spLocks xmlns:a="http://schemas.openxmlformats.org/drawingml/2006/main"/>
             </p:cNvSpPr>
             <p:nvPr/>
           </p:nvSpPr>
@@ -6243,15 +6035,15 @@
         </p:sp>
         <p:sp>
           <p:nvSpPr>
-            <p:cNvPr id="21" name="">
-              <a:extLst xmlns:a="http://schemas.openxmlformats.org/drawingml/2006/main">
-                <a:ext uri="{FF2B5EF4-FFF2-40B4-BE49-F238E27FC236}">
-                  <a16:creationId xmlns:a16="http://schemas.microsoft.com/office/drawing/2014/main" id="{026714D6-96D0-4861-89A8-AF1ED7792FAD}"/>
-                </a:ext>
-              </a:extLst>
-            </p:cNvPr>
-            <p:cNvSpPr>
-              <a:spLocks xmlns:a="http://schemas.openxmlformats.org/drawingml/2006/main" noGrp="1"/>
+            <p:cNvPr id="19" name="">
+              <a:extLst xmlns:a="http://schemas.openxmlformats.org/drawingml/2006/main">
+                <a:ext uri="{FF2B5EF4-FFF2-40B4-BE49-F238E27FC236}">
+                  <a16:creationId xmlns:a16="http://schemas.microsoft.com/office/drawing/2014/main" id="{83B8AADD-668D-47DB-A0DD-910EFBCC89C9}"/>
+                </a:ext>
+              </a:extLst>
+            </p:cNvPr>
+            <p:cNvSpPr>
+              <a:spLocks xmlns:a="http://schemas.openxmlformats.org/drawingml/2006/main"/>
             </p:cNvSpPr>
             <p:nvPr/>
           </p:nvSpPr>
@@ -6292,7 +6084,7 @@
                   <a:ea typeface="Times New Roman"/>
                   <a:cs typeface="Times New Roman"/>
                 </a:rPr>
-                <a:t>toolkit: time-series memory · numerical diagnostics · event labels · evaluator</a:t>
+                <a:t>Toolkit: knowledge memory and numerical diagnostics</a:t>
               </a:r>
             </a:p>
           </p:txBody>
@@ -6301,7 +6093,7 @@
     </p:spTree>
     <p:extLst>
       <p:ext uri="{BB962C8B-B14F-4D97-AF65-F5344CB8AC3E}">
-        <p14:creationId xmlns:p14="http://schemas.microsoft.com/office/powerpoint/2010/main" val="1516098180"/>
+        <p14:creationId xmlns:p14="http://schemas.microsoft.com/office/powerpoint/2010/main" val="1626392157"/>
       </p:ext>
     </p:extLst>
   </p:cSld>
@@ -8133,7 +7925,7 @@
                   <a:ea typeface="Times New Roman"/>
                   <a:cs typeface="Times New Roman"/>
                 </a:rPr>
-                <a:t>trace and artifact review</a:t>
+                <a:t>task-specific artifact checks</a:t>
               </a:r>
             </a:p>
           </p:txBody>
